--- a/CropSmart_BCA_Final_Project_Viva.pptx
+++ b/CropSmart_BCA_Final_Project_Viva.pptx
@@ -18,6 +18,7 @@
     <p:sldId id="266" r:id="rId17"/>
     <p:sldId id="267" r:id="rId18"/>
     <p:sldId id="268" r:id="rId19"/>
+    <p:sldId id="269" r:id="rId20"/>
   </p:sldIdLst>
   <p:sldSz cx="12191695" cy="6858000" type="screen4x3"/>
   <p:notesSz cx="6858000" cy="9144000"/>
@@ -3760,13 +3761,13 @@
           <a:p>
             <a:pPr algn="ctr"/>
             <a:r>
-              <a:rPr sz="2200" b="1">
+              <a:rPr sz="2000" b="1">
                 <a:solidFill>
                   <a:srgbClr val="F4B43E"/>
                 </a:solidFill>
                 <a:latin typeface="Aptos"/>
               </a:rPr>
-              <a:t>Run the application</a:t>
+              <a:t>Hosted demo and local run</a:t>
             </a:r>
           </a:p>
         </p:txBody>
@@ -3795,13 +3796,13 @@
           <a:p>
             <a:pPr algn="ctr"/>
             <a:r>
-              <a:rPr sz="2000" b="1">
+              <a:rPr sz="1800" b="1">
                 <a:solidFill>
                   <a:srgbClr val="FFFFFF"/>
                 </a:solidFill>
                 <a:latin typeface="Consolas"/>
               </a:rPr>
-              <a:t>python server.py 8100</a:t>
+              <a:t>GitHub Pages public URL</a:t>
             </a:r>
           </a:p>
         </p:txBody>
@@ -3836,7 +3837,7 @@
                 </a:solidFill>
                 <a:latin typeface="Consolas"/>
               </a:rPr>
-              <a:t>http://localhost:8100/</a:t>
+              <a:t>python server.py</a:t>
             </a:r>
           </a:p>
         </p:txBody>
@@ -4113,7 +4114,7 @@
                 </a:solidFill>
                 <a:latin typeface="Aptos"/>
               </a:rPr>
-              <a:t>Limitations and Future Scope</a:t>
+              <a:t>Deployment and Hosting</a:t>
             </a:r>
           </a:p>
         </p:txBody>
@@ -4197,7 +4198,7 @@
         <p:spPr>
           <a:xfrm>
             <a:off x="640080" y="1143000"/>
-            <a:ext cx="5303520" cy="4526280"/>
+            <a:ext cx="5303520" cy="2057400"/>
           </a:xfrm>
           <a:prstGeom prst="roundRect">
             <a:avLst/>
@@ -4242,17 +4243,17 @@
         <p:spPr>
           <a:xfrm>
             <a:off x="640080" y="1143000"/>
-            <a:ext cx="73152" cy="4526280"/>
+            <a:ext cx="73152" cy="2057400"/>
           </a:xfrm>
           <a:prstGeom prst="rect">
             <a:avLst/>
           </a:prstGeom>
           <a:solidFill>
-            <a:srgbClr val="B84848"/>
+            <a:srgbClr val="23855B"/>
           </a:solidFill>
           <a:ln>
             <a:solidFill>
-              <a:srgbClr val="B84848"/>
+              <a:srgbClr val="23855B"/>
             </a:solidFill>
           </a:ln>
         </p:spPr>
@@ -4304,11 +4305,11 @@
             <a:r>
               <a:rPr sz="1600" b="1">
                 <a:solidFill>
-                  <a:srgbClr val="B84848"/>
-                </a:solidFill>
-                <a:latin typeface="Aptos"/>
-              </a:rPr>
-              <a:t>Current Limitations</a:t>
+                  <a:srgbClr val="23855B"/>
+                </a:solidFill>
+                <a:latin typeface="Aptos"/>
+              </a:rPr>
+              <a:t>Public Hosting</a:t>
             </a:r>
           </a:p>
         </p:txBody>
@@ -4322,7 +4323,7 @@
         <p:spPr>
           <a:xfrm>
             <a:off x="822959" y="1627632"/>
-            <a:ext cx="4983480" cy="3931920"/>
+            <a:ext cx="4983480" cy="1463040"/>
           </a:xfrm>
           <a:prstGeom prst="rect">
             <a:avLst/>
@@ -4343,11 +4344,9 @@
                 </a:solidFill>
                 <a:latin typeface="Aptos"/>
               </a:rPr>
-              <a:t>• Public futures are benchmark prices, not exact mandi prices.
-• Not every crop has an observed public historical series.
-• External APIs may be delayed or unavailable.
-• Long-range predictions contain more uncertainty.
-• Generated fallback data cannot prove real-market accuracy.</a:t>
+              <a:t>Hosted on GitHub Pages because it is free, always available for static websites, and does not require a credit card.
+Live URL:
+ajay-prakash-pandey.github.io/crop-price-pridiction-web/</a:t>
             </a:r>
           </a:p>
         </p:txBody>
@@ -4361,7 +4360,7 @@
         <p:spPr>
           <a:xfrm>
             <a:off x="6263640" y="1143000"/>
-            <a:ext cx="5303520" cy="4526280"/>
+            <a:ext cx="5303520" cy="2057400"/>
           </a:xfrm>
           <a:prstGeom prst="roundRect">
             <a:avLst/>
@@ -4406,17 +4405,17 @@
         <p:spPr>
           <a:xfrm>
             <a:off x="6263640" y="1143000"/>
-            <a:ext cx="73152" cy="4526280"/>
+            <a:ext cx="73152" cy="2057400"/>
           </a:xfrm>
           <a:prstGeom prst="rect">
             <a:avLst/>
           </a:prstGeom>
           <a:solidFill>
-            <a:srgbClr val="23855B"/>
+            <a:srgbClr val="27699C"/>
           </a:solidFill>
           <a:ln>
             <a:solidFill>
-              <a:srgbClr val="23855B"/>
+              <a:srgbClr val="27699C"/>
             </a:solidFill>
           </a:ln>
         </p:spPr>
@@ -4468,11 +4467,11 @@
             <a:r>
               <a:rPr sz="1600" b="1">
                 <a:solidFill>
-                  <a:srgbClr val="23855B"/>
-                </a:solidFill>
-                <a:latin typeface="Aptos"/>
-              </a:rPr>
-              <a:t>Future Enhancements</a:t>
+                  <a:srgbClr val="27699C"/>
+                </a:solidFill>
+                <a:latin typeface="Aptos"/>
+              </a:rPr>
+              <a:t>Static Demo Mode</a:t>
             </a:r>
           </a:p>
         </p:txBody>
@@ -4486,7 +4485,7 @@
         <p:spPr>
           <a:xfrm>
             <a:off x="6446520" y="1627632"/>
-            <a:ext cx="4983480" cy="3931920"/>
+            <a:ext cx="4983480" cy="1463040"/>
           </a:xfrm>
           <a:prstGeom prst="rect">
             <a:avLst/>
@@ -4507,11 +4506,328 @@
                 </a:solidFill>
                 <a:latin typeface="Aptos"/>
               </a:rPr>
-              <a:t>• Add official Agmarknet and APMC datasets.
-• Create district, mandi, crop-grade, and unit-specific models.
-• Add prediction intervals and rolling backtests.
-• Add login, watchlists, alerts, and maps.
-• Deploy with a database and scheduled model refresh.</a:t>
+              <a:t>GitHub Pages cannot run Python, so the browser uses saved crop and region assumptions for forecasts, history charts, and export.
+This keeps the project demo accessible 24/7.</a:t>
+            </a:r>
+          </a:p>
+        </p:txBody>
+      </p:sp>
+      <p:sp>
+        <p:nvSpPr>
+          <p:cNvPr id="14" name="Rounded Rectangle 13"/>
+          <p:cNvSpPr/>
+          <p:nvPr/>
+        </p:nvSpPr>
+        <p:spPr>
+          <a:xfrm>
+            <a:off x="640080" y="3657600"/>
+            <a:ext cx="5303520" cy="1874519"/>
+          </a:xfrm>
+          <a:prstGeom prst="roundRect">
+            <a:avLst/>
+          </a:prstGeom>
+          <a:solidFill>
+            <a:srgbClr val="FFFFFF"/>
+          </a:solidFill>
+          <a:ln>
+            <a:solidFill>
+              <a:srgbClr val="DAE5DF"/>
+            </a:solidFill>
+          </a:ln>
+        </p:spPr>
+        <p:style>
+          <a:lnRef idx="1">
+            <a:schemeClr val="accent1"/>
+          </a:lnRef>
+          <a:fillRef idx="3">
+            <a:schemeClr val="accent1"/>
+          </a:fillRef>
+          <a:effectRef idx="2">
+            <a:schemeClr val="accent1"/>
+          </a:effectRef>
+          <a:fontRef idx="minor">
+            <a:schemeClr val="lt1"/>
+          </a:fontRef>
+        </p:style>
+        <p:txBody>
+          <a:bodyPr rtlCol="0" anchor="ctr"/>
+          <a:lstStyle/>
+          <a:p>
+            <a:pPr algn="ctr"/>
+          </a:p>
+        </p:txBody>
+      </p:sp>
+      <p:sp>
+        <p:nvSpPr>
+          <p:cNvPr id="15" name="Rectangle 14"/>
+          <p:cNvSpPr/>
+          <p:nvPr/>
+        </p:nvSpPr>
+        <p:spPr>
+          <a:xfrm>
+            <a:off x="640080" y="3657600"/>
+            <a:ext cx="73152" cy="1874519"/>
+          </a:xfrm>
+          <a:prstGeom prst="rect">
+            <a:avLst/>
+          </a:prstGeom>
+          <a:solidFill>
+            <a:srgbClr val="8D5BA6"/>
+          </a:solidFill>
+          <a:ln>
+            <a:solidFill>
+              <a:srgbClr val="8D5BA6"/>
+            </a:solidFill>
+          </a:ln>
+        </p:spPr>
+        <p:style>
+          <a:lnRef idx="1">
+            <a:schemeClr val="accent1"/>
+          </a:lnRef>
+          <a:fillRef idx="3">
+            <a:schemeClr val="accent1"/>
+          </a:fillRef>
+          <a:effectRef idx="2">
+            <a:schemeClr val="accent1"/>
+          </a:effectRef>
+          <a:fontRef idx="minor">
+            <a:schemeClr val="lt1"/>
+          </a:fontRef>
+        </p:style>
+        <p:txBody>
+          <a:bodyPr rtlCol="0" anchor="ctr"/>
+          <a:lstStyle/>
+          <a:p>
+            <a:pPr algn="ctr"/>
+          </a:p>
+        </p:txBody>
+      </p:sp>
+      <p:sp>
+        <p:nvSpPr>
+          <p:cNvPr id="16" name="TextBox 15"/>
+          <p:cNvSpPr txBox="1"/>
+          <p:nvPr/>
+        </p:nvSpPr>
+        <p:spPr>
+          <a:xfrm>
+            <a:off x="822959" y="3776472"/>
+            <a:ext cx="4983480" cy="320040"/>
+          </a:xfrm>
+          <a:prstGeom prst="rect">
+            <a:avLst/>
+          </a:prstGeom>
+          <a:noFill/>
+        </p:spPr>
+        <p:txBody>
+          <a:bodyPr wrap="square" lIns="73152" rIns="73152" tIns="73152" bIns="73152" anchor="ctr">
+            <a:spAutoFit/>
+          </a:bodyPr>
+          <a:lstStyle/>
+          <a:p>
+            <a:pPr algn="l"/>
+            <a:r>
+              <a:rPr sz="1600" b="1">
+                <a:solidFill>
+                  <a:srgbClr val="8D5BA6"/>
+                </a:solidFill>
+                <a:latin typeface="Aptos"/>
+              </a:rPr>
+              <a:t>Full Backend Mode</a:t>
+            </a:r>
+          </a:p>
+        </p:txBody>
+      </p:sp>
+      <p:sp>
+        <p:nvSpPr>
+          <p:cNvPr id="17" name="TextBox 16"/>
+          <p:cNvSpPr txBox="1"/>
+          <p:nvPr/>
+        </p:nvSpPr>
+        <p:spPr>
+          <a:xfrm>
+            <a:off x="822959" y="4142232"/>
+            <a:ext cx="4983480" cy="1280160"/>
+          </a:xfrm>
+          <a:prstGeom prst="rect">
+            <a:avLst/>
+          </a:prstGeom>
+          <a:noFill/>
+        </p:spPr>
+        <p:txBody>
+          <a:bodyPr wrap="square" lIns="73152" rIns="73152" tIns="73152" bIns="73152" anchor="ctr">
+            <a:spAutoFit/>
+          </a:bodyPr>
+          <a:lstStyle/>
+          <a:p>
+            <a:pPr algn="l"/>
+            <a:r>
+              <a:rPr sz="1200" b="0">
+                <a:solidFill>
+                  <a:srgbClr val="1F2E37"/>
+                </a:solidFill>
+                <a:latin typeface="Aptos"/>
+              </a:rPr>
+              <a:t>When server.py is running locally or on a Python host, the same frontend uses API endpoints for live signals, benchmark history, and backend exports.</a:t>
+            </a:r>
+          </a:p>
+        </p:txBody>
+      </p:sp>
+      <p:sp>
+        <p:nvSpPr>
+          <p:cNvPr id="18" name="Rounded Rectangle 17"/>
+          <p:cNvSpPr/>
+          <p:nvPr/>
+        </p:nvSpPr>
+        <p:spPr>
+          <a:xfrm>
+            <a:off x="6263640" y="3657600"/>
+            <a:ext cx="5303520" cy="1874519"/>
+          </a:xfrm>
+          <a:prstGeom prst="roundRect">
+            <a:avLst/>
+          </a:prstGeom>
+          <a:solidFill>
+            <a:srgbClr val="FFFFFF"/>
+          </a:solidFill>
+          <a:ln>
+            <a:solidFill>
+              <a:srgbClr val="DAE5DF"/>
+            </a:solidFill>
+          </a:ln>
+        </p:spPr>
+        <p:style>
+          <a:lnRef idx="1">
+            <a:schemeClr val="accent1"/>
+          </a:lnRef>
+          <a:fillRef idx="3">
+            <a:schemeClr val="accent1"/>
+          </a:fillRef>
+          <a:effectRef idx="2">
+            <a:schemeClr val="accent1"/>
+          </a:effectRef>
+          <a:fontRef idx="minor">
+            <a:schemeClr val="lt1"/>
+          </a:fontRef>
+        </p:style>
+        <p:txBody>
+          <a:bodyPr rtlCol="0" anchor="ctr"/>
+          <a:lstStyle/>
+          <a:p>
+            <a:pPr algn="ctr"/>
+          </a:p>
+        </p:txBody>
+      </p:sp>
+      <p:sp>
+        <p:nvSpPr>
+          <p:cNvPr id="19" name="Rectangle 18"/>
+          <p:cNvSpPr/>
+          <p:nvPr/>
+        </p:nvSpPr>
+        <p:spPr>
+          <a:xfrm>
+            <a:off x="6263640" y="3657600"/>
+            <a:ext cx="73152" cy="1874519"/>
+          </a:xfrm>
+          <a:prstGeom prst="rect">
+            <a:avLst/>
+          </a:prstGeom>
+          <a:solidFill>
+            <a:srgbClr val="CB7E24"/>
+          </a:solidFill>
+          <a:ln>
+            <a:solidFill>
+              <a:srgbClr val="CB7E24"/>
+            </a:solidFill>
+          </a:ln>
+        </p:spPr>
+        <p:style>
+          <a:lnRef idx="1">
+            <a:schemeClr val="accent1"/>
+          </a:lnRef>
+          <a:fillRef idx="3">
+            <a:schemeClr val="accent1"/>
+          </a:fillRef>
+          <a:effectRef idx="2">
+            <a:schemeClr val="accent1"/>
+          </a:effectRef>
+          <a:fontRef idx="minor">
+            <a:schemeClr val="lt1"/>
+          </a:fontRef>
+        </p:style>
+        <p:txBody>
+          <a:bodyPr rtlCol="0" anchor="ctr"/>
+          <a:lstStyle/>
+          <a:p>
+            <a:pPr algn="ctr"/>
+          </a:p>
+        </p:txBody>
+      </p:sp>
+      <p:sp>
+        <p:nvSpPr>
+          <p:cNvPr id="20" name="TextBox 19"/>
+          <p:cNvSpPr txBox="1"/>
+          <p:nvPr/>
+        </p:nvSpPr>
+        <p:spPr>
+          <a:xfrm>
+            <a:off x="6446520" y="3776472"/>
+            <a:ext cx="4983480" cy="320040"/>
+          </a:xfrm>
+          <a:prstGeom prst="rect">
+            <a:avLst/>
+          </a:prstGeom>
+          <a:noFill/>
+        </p:spPr>
+        <p:txBody>
+          <a:bodyPr wrap="square" lIns="73152" rIns="73152" tIns="73152" bIns="73152" anchor="ctr">
+            <a:spAutoFit/>
+          </a:bodyPr>
+          <a:lstStyle/>
+          <a:p>
+            <a:pPr algn="l"/>
+            <a:r>
+              <a:rPr sz="1600" b="1">
+                <a:solidFill>
+                  <a:srgbClr val="CB7E24"/>
+                </a:solidFill>
+                <a:latin typeface="Aptos"/>
+              </a:rPr>
+              <a:t>Deployment Learning</a:t>
+            </a:r>
+          </a:p>
+        </p:txBody>
+      </p:sp>
+      <p:sp>
+        <p:nvSpPr>
+          <p:cNvPr id="21" name="TextBox 20"/>
+          <p:cNvSpPr txBox="1"/>
+          <p:nvPr/>
+        </p:nvSpPr>
+        <p:spPr>
+          <a:xfrm>
+            <a:off x="6446520" y="4142232"/>
+            <a:ext cx="4983480" cy="1280160"/>
+          </a:xfrm>
+          <a:prstGeom prst="rect">
+            <a:avLst/>
+          </a:prstGeom>
+          <a:noFill/>
+        </p:spPr>
+        <p:txBody>
+          <a:bodyPr wrap="square" lIns="73152" rIns="73152" tIns="73152" bIns="73152" anchor="ctr">
+            <a:spAutoFit/>
+          </a:bodyPr>
+          <a:lstStyle/>
+          <a:p>
+            <a:pPr algn="l"/>
+            <a:r>
+              <a:rPr sz="1200" b="0">
+                <a:solidFill>
+                  <a:srgbClr val="1F2E37"/>
+                </a:solidFill>
+                <a:latin typeface="Aptos"/>
+              </a:rPr>
+              <a:t>The project demonstrates two practical deployment choices: a free public static demo and a Python backend version for live data.</a:t>
             </a:r>
           </a:p>
         </p:txBody>
@@ -4617,7 +4933,7 @@
                 </a:solidFill>
                 <a:latin typeface="Aptos"/>
               </a:rPr>
-              <a:t>Key Viva Answers</a:t>
+              <a:t>Limitations and Future Scope</a:t>
             </a:r>
           </a:p>
         </p:txBody>
@@ -4700,8 +5016,8 @@
         </p:nvSpPr>
         <p:spPr>
           <a:xfrm>
-            <a:off x="594360" y="1078992"/>
-            <a:ext cx="5212080" cy="1234440"/>
+            <a:off x="640080" y="1143000"/>
+            <a:ext cx="5303520" cy="4526280"/>
           </a:xfrm>
           <a:prstGeom prst="roundRect">
             <a:avLst/>
@@ -4745,8 +5061,172 @@
         </p:nvSpPr>
         <p:spPr>
           <a:xfrm>
-            <a:off x="594360" y="1078992"/>
-            <a:ext cx="73152" cy="1234440"/>
+            <a:off x="640080" y="1143000"/>
+            <a:ext cx="73152" cy="4526280"/>
+          </a:xfrm>
+          <a:prstGeom prst="rect">
+            <a:avLst/>
+          </a:prstGeom>
+          <a:solidFill>
+            <a:srgbClr val="B84848"/>
+          </a:solidFill>
+          <a:ln>
+            <a:solidFill>
+              <a:srgbClr val="B84848"/>
+            </a:solidFill>
+          </a:ln>
+        </p:spPr>
+        <p:style>
+          <a:lnRef idx="1">
+            <a:schemeClr val="accent1"/>
+          </a:lnRef>
+          <a:fillRef idx="3">
+            <a:schemeClr val="accent1"/>
+          </a:fillRef>
+          <a:effectRef idx="2">
+            <a:schemeClr val="accent1"/>
+          </a:effectRef>
+          <a:fontRef idx="minor">
+            <a:schemeClr val="lt1"/>
+          </a:fontRef>
+        </p:style>
+        <p:txBody>
+          <a:bodyPr rtlCol="0" anchor="ctr"/>
+          <a:lstStyle/>
+          <a:p>
+            <a:pPr algn="ctr"/>
+          </a:p>
+        </p:txBody>
+      </p:sp>
+      <p:sp>
+        <p:nvSpPr>
+          <p:cNvPr id="8" name="TextBox 7"/>
+          <p:cNvSpPr txBox="1"/>
+          <p:nvPr/>
+        </p:nvSpPr>
+        <p:spPr>
+          <a:xfrm>
+            <a:off x="822959" y="1261872"/>
+            <a:ext cx="4983480" cy="320040"/>
+          </a:xfrm>
+          <a:prstGeom prst="rect">
+            <a:avLst/>
+          </a:prstGeom>
+          <a:noFill/>
+        </p:spPr>
+        <p:txBody>
+          <a:bodyPr wrap="square" lIns="73152" rIns="73152" tIns="73152" bIns="73152" anchor="ctr">
+            <a:spAutoFit/>
+          </a:bodyPr>
+          <a:lstStyle/>
+          <a:p>
+            <a:pPr algn="l"/>
+            <a:r>
+              <a:rPr sz="1600" b="1">
+                <a:solidFill>
+                  <a:srgbClr val="B84848"/>
+                </a:solidFill>
+                <a:latin typeface="Aptos"/>
+              </a:rPr>
+              <a:t>Current Limitations</a:t>
+            </a:r>
+          </a:p>
+        </p:txBody>
+      </p:sp>
+      <p:sp>
+        <p:nvSpPr>
+          <p:cNvPr id="9" name="TextBox 8"/>
+          <p:cNvSpPr txBox="1"/>
+          <p:nvPr/>
+        </p:nvSpPr>
+        <p:spPr>
+          <a:xfrm>
+            <a:off x="822959" y="1627632"/>
+            <a:ext cx="4983480" cy="3931920"/>
+          </a:xfrm>
+          <a:prstGeom prst="rect">
+            <a:avLst/>
+          </a:prstGeom>
+          <a:noFill/>
+        </p:spPr>
+        <p:txBody>
+          <a:bodyPr wrap="square" lIns="73152" rIns="73152" tIns="73152" bIns="73152" anchor="ctr">
+            <a:spAutoFit/>
+          </a:bodyPr>
+          <a:lstStyle/>
+          <a:p>
+            <a:pPr algn="l"/>
+            <a:r>
+              <a:rPr sz="1200" b="0">
+                <a:solidFill>
+                  <a:srgbClr val="1F2E37"/>
+                </a:solidFill>
+                <a:latin typeface="Aptos"/>
+              </a:rPr>
+              <a:t>• Public futures are benchmark prices, not exact mandi prices.
+• Not every crop has an observed public historical series.
+• External APIs may be delayed or unavailable.
+• Long-range predictions contain more uncertainty.
+• Generated fallback data cannot prove real-market accuracy.</a:t>
+            </a:r>
+          </a:p>
+        </p:txBody>
+      </p:sp>
+      <p:sp>
+        <p:nvSpPr>
+          <p:cNvPr id="10" name="Rounded Rectangle 9"/>
+          <p:cNvSpPr/>
+          <p:nvPr/>
+        </p:nvSpPr>
+        <p:spPr>
+          <a:xfrm>
+            <a:off x="6263640" y="1143000"/>
+            <a:ext cx="5303520" cy="4526280"/>
+          </a:xfrm>
+          <a:prstGeom prst="roundRect">
+            <a:avLst/>
+          </a:prstGeom>
+          <a:solidFill>
+            <a:srgbClr val="FFFFFF"/>
+          </a:solidFill>
+          <a:ln>
+            <a:solidFill>
+              <a:srgbClr val="DAE5DF"/>
+            </a:solidFill>
+          </a:ln>
+        </p:spPr>
+        <p:style>
+          <a:lnRef idx="1">
+            <a:schemeClr val="accent1"/>
+          </a:lnRef>
+          <a:fillRef idx="3">
+            <a:schemeClr val="accent1"/>
+          </a:fillRef>
+          <a:effectRef idx="2">
+            <a:schemeClr val="accent1"/>
+          </a:effectRef>
+          <a:fontRef idx="minor">
+            <a:schemeClr val="lt1"/>
+          </a:fontRef>
+        </p:style>
+        <p:txBody>
+          <a:bodyPr rtlCol="0" anchor="ctr"/>
+          <a:lstStyle/>
+          <a:p>
+            <a:pPr algn="ctr"/>
+          </a:p>
+        </p:txBody>
+      </p:sp>
+      <p:sp>
+        <p:nvSpPr>
+          <p:cNvPr id="11" name="Rectangle 10"/>
+          <p:cNvSpPr/>
+          <p:nvPr/>
+        </p:nvSpPr>
+        <p:spPr>
+          <a:xfrm>
+            <a:off x="6263640" y="1143000"/>
+            <a:ext cx="73152" cy="4526280"/>
           </a:xfrm>
           <a:prstGeom prst="rect">
             <a:avLst/>
@@ -4784,14 +5264,14 @@
       </p:sp>
       <p:sp>
         <p:nvSpPr>
-          <p:cNvPr id="8" name="TextBox 7"/>
-          <p:cNvSpPr txBox="1"/>
-          <p:nvPr/>
-        </p:nvSpPr>
-        <p:spPr>
-          <a:xfrm>
-            <a:off x="777240" y="1197864"/>
-            <a:ext cx="4892040" cy="320040"/>
+          <p:cNvPr id="12" name="TextBox 11"/>
+          <p:cNvSpPr txBox="1"/>
+          <p:nvPr/>
+        </p:nvSpPr>
+        <p:spPr>
+          <a:xfrm>
+            <a:off x="6446520" y="1261872"/>
+            <a:ext cx="4983480" cy="320040"/>
           </a:xfrm>
           <a:prstGeom prst="rect">
             <a:avLst/>
@@ -4812,21 +5292,21 @@
                 </a:solidFill>
                 <a:latin typeface="Aptos"/>
               </a:rPr>
-              <a:t>Project type?</a:t>
-            </a:r>
-          </a:p>
-        </p:txBody>
-      </p:sp>
-      <p:sp>
-        <p:nvSpPr>
-          <p:cNvPr id="9" name="TextBox 8"/>
-          <p:cNvSpPr txBox="1"/>
-          <p:nvPr/>
-        </p:nvSpPr>
-        <p:spPr>
-          <a:xfrm>
-            <a:off x="777240" y="1563624"/>
-            <a:ext cx="4892040" cy="640080"/>
+              <a:t>Future Enhancements</a:t>
+            </a:r>
+          </a:p>
+        </p:txBody>
+      </p:sp>
+      <p:sp>
+        <p:nvSpPr>
+          <p:cNvPr id="13" name="TextBox 12"/>
+          <p:cNvSpPr txBox="1"/>
+          <p:nvPr/>
+        </p:nvSpPr>
+        <p:spPr>
+          <a:xfrm>
+            <a:off x="6446520" y="1627632"/>
+            <a:ext cx="4983480" cy="3931920"/>
           </a:xfrm>
           <a:prstGeom prst="rect">
             <a:avLst/>
@@ -4847,807 +5327,11 @@
                 </a:solidFill>
                 <a:latin typeface="Aptos"/>
               </a:rPr>
-              <a:t>A regression and time-series forecasting web application.</a:t>
-            </a:r>
-          </a:p>
-        </p:txBody>
-      </p:sp>
-      <p:sp>
-        <p:nvSpPr>
-          <p:cNvPr id="10" name="Rounded Rectangle 9"/>
-          <p:cNvSpPr/>
-          <p:nvPr/>
-        </p:nvSpPr>
-        <p:spPr>
-          <a:xfrm>
-            <a:off x="6217920" y="1078992"/>
-            <a:ext cx="5212080" cy="1234440"/>
-          </a:xfrm>
-          <a:prstGeom prst="roundRect">
-            <a:avLst/>
-          </a:prstGeom>
-          <a:solidFill>
-            <a:srgbClr val="FFFFFF"/>
-          </a:solidFill>
-          <a:ln>
-            <a:solidFill>
-              <a:srgbClr val="DAE5DF"/>
-            </a:solidFill>
-          </a:ln>
-        </p:spPr>
-        <p:style>
-          <a:lnRef idx="1">
-            <a:schemeClr val="accent1"/>
-          </a:lnRef>
-          <a:fillRef idx="3">
-            <a:schemeClr val="accent1"/>
-          </a:fillRef>
-          <a:effectRef idx="2">
-            <a:schemeClr val="accent1"/>
-          </a:effectRef>
-          <a:fontRef idx="minor">
-            <a:schemeClr val="lt1"/>
-          </a:fontRef>
-        </p:style>
-        <p:txBody>
-          <a:bodyPr rtlCol="0" anchor="ctr"/>
-          <a:lstStyle/>
-          <a:p>
-            <a:pPr algn="ctr"/>
-          </a:p>
-        </p:txBody>
-      </p:sp>
-      <p:sp>
-        <p:nvSpPr>
-          <p:cNvPr id="11" name="Rectangle 10"/>
-          <p:cNvSpPr/>
-          <p:nvPr/>
-        </p:nvSpPr>
-        <p:spPr>
-          <a:xfrm>
-            <a:off x="6217920" y="1078992"/>
-            <a:ext cx="73152" cy="1234440"/>
-          </a:xfrm>
-          <a:prstGeom prst="rect">
-            <a:avLst/>
-          </a:prstGeom>
-          <a:solidFill>
-            <a:srgbClr val="27699C"/>
-          </a:solidFill>
-          <a:ln>
-            <a:solidFill>
-              <a:srgbClr val="27699C"/>
-            </a:solidFill>
-          </a:ln>
-        </p:spPr>
-        <p:style>
-          <a:lnRef idx="1">
-            <a:schemeClr val="accent1"/>
-          </a:lnRef>
-          <a:fillRef idx="3">
-            <a:schemeClr val="accent1"/>
-          </a:fillRef>
-          <a:effectRef idx="2">
-            <a:schemeClr val="accent1"/>
-          </a:effectRef>
-          <a:fontRef idx="minor">
-            <a:schemeClr val="lt1"/>
-          </a:fontRef>
-        </p:style>
-        <p:txBody>
-          <a:bodyPr rtlCol="0" anchor="ctr"/>
-          <a:lstStyle/>
-          <a:p>
-            <a:pPr algn="ctr"/>
-          </a:p>
-        </p:txBody>
-      </p:sp>
-      <p:sp>
-        <p:nvSpPr>
-          <p:cNvPr id="12" name="TextBox 11"/>
-          <p:cNvSpPr txBox="1"/>
-          <p:nvPr/>
-        </p:nvSpPr>
-        <p:spPr>
-          <a:xfrm>
-            <a:off x="6400800" y="1197864"/>
-            <a:ext cx="4892040" cy="320040"/>
-          </a:xfrm>
-          <a:prstGeom prst="rect">
-            <a:avLst/>
-          </a:prstGeom>
-          <a:noFill/>
-        </p:spPr>
-        <p:txBody>
-          <a:bodyPr wrap="square" lIns="73152" rIns="73152" tIns="73152" bIns="73152" anchor="ctr">
-            <a:spAutoFit/>
-          </a:bodyPr>
-          <a:lstStyle/>
-          <a:p>
-            <a:pPr algn="l"/>
-            <a:r>
-              <a:rPr sz="1600" b="1">
-                <a:solidFill>
-                  <a:srgbClr val="27699C"/>
-                </a:solidFill>
-                <a:latin typeface="Aptos"/>
-              </a:rPr>
-              <a:t>Why ridge regression?</a:t>
-            </a:r>
-          </a:p>
-        </p:txBody>
-      </p:sp>
-      <p:sp>
-        <p:nvSpPr>
-          <p:cNvPr id="13" name="TextBox 12"/>
-          <p:cNvSpPr txBox="1"/>
-          <p:nvPr/>
-        </p:nvSpPr>
-        <p:spPr>
-          <a:xfrm>
-            <a:off x="6400800" y="1563624"/>
-            <a:ext cx="4892040" cy="640080"/>
-          </a:xfrm>
-          <a:prstGeom prst="rect">
-            <a:avLst/>
-          </a:prstGeom>
-          <a:noFill/>
-        </p:spPr>
-        <p:txBody>
-          <a:bodyPr wrap="square" lIns="73152" rIns="73152" tIns="73152" bIns="73152" anchor="ctr">
-            <a:spAutoFit/>
-          </a:bodyPr>
-          <a:lstStyle/>
-          <a:p>
-            <a:pPr algn="l"/>
-            <a:r>
-              <a:rPr sz="1200" b="0">
-                <a:solidFill>
-                  <a:srgbClr val="1F2E37"/>
-                </a:solidFill>
-                <a:latin typeface="Aptos"/>
-              </a:rPr>
-              <a:t>It is fast, interpretable, handles correlated features, and reduces overfitting.</a:t>
-            </a:r>
-          </a:p>
-        </p:txBody>
-      </p:sp>
-      <p:sp>
-        <p:nvSpPr>
-          <p:cNvPr id="14" name="Rounded Rectangle 13"/>
-          <p:cNvSpPr/>
-          <p:nvPr/>
-        </p:nvSpPr>
-        <p:spPr>
-          <a:xfrm>
-            <a:off x="594360" y="2660904"/>
-            <a:ext cx="5212080" cy="1234440"/>
-          </a:xfrm>
-          <a:prstGeom prst="roundRect">
-            <a:avLst/>
-          </a:prstGeom>
-          <a:solidFill>
-            <a:srgbClr val="FFFFFF"/>
-          </a:solidFill>
-          <a:ln>
-            <a:solidFill>
-              <a:srgbClr val="DAE5DF"/>
-            </a:solidFill>
-          </a:ln>
-        </p:spPr>
-        <p:style>
-          <a:lnRef idx="1">
-            <a:schemeClr val="accent1"/>
-          </a:lnRef>
-          <a:fillRef idx="3">
-            <a:schemeClr val="accent1"/>
-          </a:fillRef>
-          <a:effectRef idx="2">
-            <a:schemeClr val="accent1"/>
-          </a:effectRef>
-          <a:fontRef idx="minor">
-            <a:schemeClr val="lt1"/>
-          </a:fontRef>
-        </p:style>
-        <p:txBody>
-          <a:bodyPr rtlCol="0" anchor="ctr"/>
-          <a:lstStyle/>
-          <a:p>
-            <a:pPr algn="ctr"/>
-          </a:p>
-        </p:txBody>
-      </p:sp>
-      <p:sp>
-        <p:nvSpPr>
-          <p:cNvPr id="15" name="Rectangle 14"/>
-          <p:cNvSpPr/>
-          <p:nvPr/>
-        </p:nvSpPr>
-        <p:spPr>
-          <a:xfrm>
-            <a:off x="594360" y="2660904"/>
-            <a:ext cx="73152" cy="1234440"/>
-          </a:xfrm>
-          <a:prstGeom prst="rect">
-            <a:avLst/>
-          </a:prstGeom>
-          <a:solidFill>
-            <a:srgbClr val="23855B"/>
-          </a:solidFill>
-          <a:ln>
-            <a:solidFill>
-              <a:srgbClr val="23855B"/>
-            </a:solidFill>
-          </a:ln>
-        </p:spPr>
-        <p:style>
-          <a:lnRef idx="1">
-            <a:schemeClr val="accent1"/>
-          </a:lnRef>
-          <a:fillRef idx="3">
-            <a:schemeClr val="accent1"/>
-          </a:fillRef>
-          <a:effectRef idx="2">
-            <a:schemeClr val="accent1"/>
-          </a:effectRef>
-          <a:fontRef idx="minor">
-            <a:schemeClr val="lt1"/>
-          </a:fontRef>
-        </p:style>
-        <p:txBody>
-          <a:bodyPr rtlCol="0" anchor="ctr"/>
-          <a:lstStyle/>
-          <a:p>
-            <a:pPr algn="ctr"/>
-          </a:p>
-        </p:txBody>
-      </p:sp>
-      <p:sp>
-        <p:nvSpPr>
-          <p:cNvPr id="16" name="TextBox 15"/>
-          <p:cNvSpPr txBox="1"/>
-          <p:nvPr/>
-        </p:nvSpPr>
-        <p:spPr>
-          <a:xfrm>
-            <a:off x="777240" y="2779776"/>
-            <a:ext cx="4892040" cy="320040"/>
-          </a:xfrm>
-          <a:prstGeom prst="rect">
-            <a:avLst/>
-          </a:prstGeom>
-          <a:noFill/>
-        </p:spPr>
-        <p:txBody>
-          <a:bodyPr wrap="square" lIns="73152" rIns="73152" tIns="73152" bIns="73152" anchor="ctr">
-            <a:spAutoFit/>
-          </a:bodyPr>
-          <a:lstStyle/>
-          <a:p>
-            <a:pPr algn="l"/>
-            <a:r>
-              <a:rPr sz="1600" b="1">
-                <a:solidFill>
-                  <a:srgbClr val="23855B"/>
-                </a:solidFill>
-                <a:latin typeface="Aptos"/>
-              </a:rPr>
-              <a:t>What is a lag?</a:t>
-            </a:r>
-          </a:p>
-        </p:txBody>
-      </p:sp>
-      <p:sp>
-        <p:nvSpPr>
-          <p:cNvPr id="17" name="TextBox 16"/>
-          <p:cNvSpPr txBox="1"/>
-          <p:nvPr/>
-        </p:nvSpPr>
-        <p:spPr>
-          <a:xfrm>
-            <a:off x="777240" y="3145536"/>
-            <a:ext cx="4892040" cy="640080"/>
-          </a:xfrm>
-          <a:prstGeom prst="rect">
-            <a:avLst/>
-          </a:prstGeom>
-          <a:noFill/>
-        </p:spPr>
-        <p:txBody>
-          <a:bodyPr wrap="square" lIns="73152" rIns="73152" tIns="73152" bIns="73152" anchor="ctr">
-            <a:spAutoFit/>
-          </a:bodyPr>
-          <a:lstStyle/>
-          <a:p>
-            <a:pPr algn="l"/>
-            <a:r>
-              <a:rPr sz="1200" b="0">
-                <a:solidFill>
-                  <a:srgbClr val="1F2E37"/>
-                </a:solidFill>
-                <a:latin typeface="Aptos"/>
-              </a:rPr>
-              <a:t>A previous price value used as an input for forecasting.</a:t>
-            </a:r>
-          </a:p>
-        </p:txBody>
-      </p:sp>
-      <p:sp>
-        <p:nvSpPr>
-          <p:cNvPr id="18" name="Rounded Rectangle 17"/>
-          <p:cNvSpPr/>
-          <p:nvPr/>
-        </p:nvSpPr>
-        <p:spPr>
-          <a:xfrm>
-            <a:off x="6217920" y="2660904"/>
-            <a:ext cx="5212080" cy="1234440"/>
-          </a:xfrm>
-          <a:prstGeom prst="roundRect">
-            <a:avLst/>
-          </a:prstGeom>
-          <a:solidFill>
-            <a:srgbClr val="FFFFFF"/>
-          </a:solidFill>
-          <a:ln>
-            <a:solidFill>
-              <a:srgbClr val="DAE5DF"/>
-            </a:solidFill>
-          </a:ln>
-        </p:spPr>
-        <p:style>
-          <a:lnRef idx="1">
-            <a:schemeClr val="accent1"/>
-          </a:lnRef>
-          <a:fillRef idx="3">
-            <a:schemeClr val="accent1"/>
-          </a:fillRef>
-          <a:effectRef idx="2">
-            <a:schemeClr val="accent1"/>
-          </a:effectRef>
-          <a:fontRef idx="minor">
-            <a:schemeClr val="lt1"/>
-          </a:fontRef>
-        </p:style>
-        <p:txBody>
-          <a:bodyPr rtlCol="0" anchor="ctr"/>
-          <a:lstStyle/>
-          <a:p>
-            <a:pPr algn="ctr"/>
-          </a:p>
-        </p:txBody>
-      </p:sp>
-      <p:sp>
-        <p:nvSpPr>
-          <p:cNvPr id="19" name="Rectangle 18"/>
-          <p:cNvSpPr/>
-          <p:nvPr/>
-        </p:nvSpPr>
-        <p:spPr>
-          <a:xfrm>
-            <a:off x="6217920" y="2660904"/>
-            <a:ext cx="73152" cy="1234440"/>
-          </a:xfrm>
-          <a:prstGeom prst="rect">
-            <a:avLst/>
-          </a:prstGeom>
-          <a:solidFill>
-            <a:srgbClr val="27699C"/>
-          </a:solidFill>
-          <a:ln>
-            <a:solidFill>
-              <a:srgbClr val="27699C"/>
-            </a:solidFill>
-          </a:ln>
-        </p:spPr>
-        <p:style>
-          <a:lnRef idx="1">
-            <a:schemeClr val="accent1"/>
-          </a:lnRef>
-          <a:fillRef idx="3">
-            <a:schemeClr val="accent1"/>
-          </a:fillRef>
-          <a:effectRef idx="2">
-            <a:schemeClr val="accent1"/>
-          </a:effectRef>
-          <a:fontRef idx="minor">
-            <a:schemeClr val="lt1"/>
-          </a:fontRef>
-        </p:style>
-        <p:txBody>
-          <a:bodyPr rtlCol="0" anchor="ctr"/>
-          <a:lstStyle/>
-          <a:p>
-            <a:pPr algn="ctr"/>
-          </a:p>
-        </p:txBody>
-      </p:sp>
-      <p:sp>
-        <p:nvSpPr>
-          <p:cNvPr id="20" name="TextBox 19"/>
-          <p:cNvSpPr txBox="1"/>
-          <p:nvPr/>
-        </p:nvSpPr>
-        <p:spPr>
-          <a:xfrm>
-            <a:off x="6400800" y="2779776"/>
-            <a:ext cx="4892040" cy="320040"/>
-          </a:xfrm>
-          <a:prstGeom prst="rect">
-            <a:avLst/>
-          </a:prstGeom>
-          <a:noFill/>
-        </p:spPr>
-        <p:txBody>
-          <a:bodyPr wrap="square" lIns="73152" rIns="73152" tIns="73152" bIns="73152" anchor="ctr">
-            <a:spAutoFit/>
-          </a:bodyPr>
-          <a:lstStyle/>
-          <a:p>
-            <a:pPr algn="l"/>
-            <a:r>
-              <a:rPr sz="1600" b="1">
-                <a:solidFill>
-                  <a:srgbClr val="27699C"/>
-                </a:solidFill>
-                <a:latin typeface="Aptos"/>
-              </a:rPr>
-              <a:t>What is MAPE?</a:t>
-            </a:r>
-          </a:p>
-        </p:txBody>
-      </p:sp>
-      <p:sp>
-        <p:nvSpPr>
-          <p:cNvPr id="21" name="TextBox 20"/>
-          <p:cNvSpPr txBox="1"/>
-          <p:nvPr/>
-        </p:nvSpPr>
-        <p:spPr>
-          <a:xfrm>
-            <a:off x="6400800" y="3145536"/>
-            <a:ext cx="4892040" cy="640080"/>
-          </a:xfrm>
-          <a:prstGeom prst="rect">
-            <a:avLst/>
-          </a:prstGeom>
-          <a:noFill/>
-        </p:spPr>
-        <p:txBody>
-          <a:bodyPr wrap="square" lIns="73152" rIns="73152" tIns="73152" bIns="73152" anchor="ctr">
-            <a:spAutoFit/>
-          </a:bodyPr>
-          <a:lstStyle/>
-          <a:p>
-            <a:pPr algn="l"/>
-            <a:r>
-              <a:rPr sz="1200" b="0">
-                <a:solidFill>
-                  <a:srgbClr val="1F2E37"/>
-                </a:solidFill>
-                <a:latin typeface="Aptos"/>
-              </a:rPr>
-              <a:t>Average prediction error expressed as a percentage; lower is better.</a:t>
-            </a:r>
-          </a:p>
-        </p:txBody>
-      </p:sp>
-      <p:sp>
-        <p:nvSpPr>
-          <p:cNvPr id="22" name="Rounded Rectangle 21"/>
-          <p:cNvSpPr/>
-          <p:nvPr/>
-        </p:nvSpPr>
-        <p:spPr>
-          <a:xfrm>
-            <a:off x="594360" y="4242816"/>
-            <a:ext cx="5212080" cy="1234440"/>
-          </a:xfrm>
-          <a:prstGeom prst="roundRect">
-            <a:avLst/>
-          </a:prstGeom>
-          <a:solidFill>
-            <a:srgbClr val="FFFFFF"/>
-          </a:solidFill>
-          <a:ln>
-            <a:solidFill>
-              <a:srgbClr val="DAE5DF"/>
-            </a:solidFill>
-          </a:ln>
-        </p:spPr>
-        <p:style>
-          <a:lnRef idx="1">
-            <a:schemeClr val="accent1"/>
-          </a:lnRef>
-          <a:fillRef idx="3">
-            <a:schemeClr val="accent1"/>
-          </a:fillRef>
-          <a:effectRef idx="2">
-            <a:schemeClr val="accent1"/>
-          </a:effectRef>
-          <a:fontRef idx="minor">
-            <a:schemeClr val="lt1"/>
-          </a:fontRef>
-        </p:style>
-        <p:txBody>
-          <a:bodyPr rtlCol="0" anchor="ctr"/>
-          <a:lstStyle/>
-          <a:p>
-            <a:pPr algn="ctr"/>
-          </a:p>
-        </p:txBody>
-      </p:sp>
-      <p:sp>
-        <p:nvSpPr>
-          <p:cNvPr id="23" name="Rectangle 22"/>
-          <p:cNvSpPr/>
-          <p:nvPr/>
-        </p:nvSpPr>
-        <p:spPr>
-          <a:xfrm>
-            <a:off x="594360" y="4242816"/>
-            <a:ext cx="73152" cy="1234440"/>
-          </a:xfrm>
-          <a:prstGeom prst="rect">
-            <a:avLst/>
-          </a:prstGeom>
-          <a:solidFill>
-            <a:srgbClr val="23855B"/>
-          </a:solidFill>
-          <a:ln>
-            <a:solidFill>
-              <a:srgbClr val="23855B"/>
-            </a:solidFill>
-          </a:ln>
-        </p:spPr>
-        <p:style>
-          <a:lnRef idx="1">
-            <a:schemeClr val="accent1"/>
-          </a:lnRef>
-          <a:fillRef idx="3">
-            <a:schemeClr val="accent1"/>
-          </a:fillRef>
-          <a:effectRef idx="2">
-            <a:schemeClr val="accent1"/>
-          </a:effectRef>
-          <a:fontRef idx="minor">
-            <a:schemeClr val="lt1"/>
-          </a:fontRef>
-        </p:style>
-        <p:txBody>
-          <a:bodyPr rtlCol="0" anchor="ctr"/>
-          <a:lstStyle/>
-          <a:p>
-            <a:pPr algn="ctr"/>
-          </a:p>
-        </p:txBody>
-      </p:sp>
-      <p:sp>
-        <p:nvSpPr>
-          <p:cNvPr id="24" name="TextBox 23"/>
-          <p:cNvSpPr txBox="1"/>
-          <p:nvPr/>
-        </p:nvSpPr>
-        <p:spPr>
-          <a:xfrm>
-            <a:off x="777240" y="4361688"/>
-            <a:ext cx="4892040" cy="320040"/>
-          </a:xfrm>
-          <a:prstGeom prst="rect">
-            <a:avLst/>
-          </a:prstGeom>
-          <a:noFill/>
-        </p:spPr>
-        <p:txBody>
-          <a:bodyPr wrap="square" lIns="73152" rIns="73152" tIns="73152" bIns="73152" anchor="ctr">
-            <a:spAutoFit/>
-          </a:bodyPr>
-          <a:lstStyle/>
-          <a:p>
-            <a:pPr algn="l"/>
-            <a:r>
-              <a:rPr sz="1600" b="1">
-                <a:solidFill>
-                  <a:srgbClr val="23855B"/>
-                </a:solidFill>
-                <a:latin typeface="Aptos"/>
-              </a:rPr>
-              <a:t>Is the price guaranteed?</a:t>
-            </a:r>
-          </a:p>
-        </p:txBody>
-      </p:sp>
-      <p:sp>
-        <p:nvSpPr>
-          <p:cNvPr id="25" name="TextBox 24"/>
-          <p:cNvSpPr txBox="1"/>
-          <p:nvPr/>
-        </p:nvSpPr>
-        <p:spPr>
-          <a:xfrm>
-            <a:off x="777240" y="4727448"/>
-            <a:ext cx="4892040" cy="640080"/>
-          </a:xfrm>
-          <a:prstGeom prst="rect">
-            <a:avLst/>
-          </a:prstGeom>
-          <a:noFill/>
-        </p:spPr>
-        <p:txBody>
-          <a:bodyPr wrap="square" lIns="73152" rIns="73152" tIns="73152" bIns="73152" anchor="ctr">
-            <a:spAutoFit/>
-          </a:bodyPr>
-          <a:lstStyle/>
-          <a:p>
-            <a:pPr algn="l"/>
-            <a:r>
-              <a:rPr sz="1200" b="0">
-                <a:solidFill>
-                  <a:srgbClr val="1F2E37"/>
-                </a:solidFill>
-                <a:latin typeface="Aptos"/>
-              </a:rPr>
-              <a:t>No. It is a planning estimate affected by market uncertainty.</a:t>
-            </a:r>
-          </a:p>
-        </p:txBody>
-      </p:sp>
-      <p:sp>
-        <p:nvSpPr>
-          <p:cNvPr id="26" name="Rounded Rectangle 25"/>
-          <p:cNvSpPr/>
-          <p:nvPr/>
-        </p:nvSpPr>
-        <p:spPr>
-          <a:xfrm>
-            <a:off x="6217920" y="4242816"/>
-            <a:ext cx="5212080" cy="1234440"/>
-          </a:xfrm>
-          <a:prstGeom prst="roundRect">
-            <a:avLst/>
-          </a:prstGeom>
-          <a:solidFill>
-            <a:srgbClr val="FFFFFF"/>
-          </a:solidFill>
-          <a:ln>
-            <a:solidFill>
-              <a:srgbClr val="DAE5DF"/>
-            </a:solidFill>
-          </a:ln>
-        </p:spPr>
-        <p:style>
-          <a:lnRef idx="1">
-            <a:schemeClr val="accent1"/>
-          </a:lnRef>
-          <a:fillRef idx="3">
-            <a:schemeClr val="accent1"/>
-          </a:fillRef>
-          <a:effectRef idx="2">
-            <a:schemeClr val="accent1"/>
-          </a:effectRef>
-          <a:fontRef idx="minor">
-            <a:schemeClr val="lt1"/>
-          </a:fontRef>
-        </p:style>
-        <p:txBody>
-          <a:bodyPr rtlCol="0" anchor="ctr"/>
-          <a:lstStyle/>
-          <a:p>
-            <a:pPr algn="ctr"/>
-          </a:p>
-        </p:txBody>
-      </p:sp>
-      <p:sp>
-        <p:nvSpPr>
-          <p:cNvPr id="27" name="Rectangle 26"/>
-          <p:cNvSpPr/>
-          <p:nvPr/>
-        </p:nvSpPr>
-        <p:spPr>
-          <a:xfrm>
-            <a:off x="6217920" y="4242816"/>
-            <a:ext cx="73152" cy="1234440"/>
-          </a:xfrm>
-          <a:prstGeom prst="rect">
-            <a:avLst/>
-          </a:prstGeom>
-          <a:solidFill>
-            <a:srgbClr val="27699C"/>
-          </a:solidFill>
-          <a:ln>
-            <a:solidFill>
-              <a:srgbClr val="27699C"/>
-            </a:solidFill>
-          </a:ln>
-        </p:spPr>
-        <p:style>
-          <a:lnRef idx="1">
-            <a:schemeClr val="accent1"/>
-          </a:lnRef>
-          <a:fillRef idx="3">
-            <a:schemeClr val="accent1"/>
-          </a:fillRef>
-          <a:effectRef idx="2">
-            <a:schemeClr val="accent1"/>
-          </a:effectRef>
-          <a:fontRef idx="minor">
-            <a:schemeClr val="lt1"/>
-          </a:fontRef>
-        </p:style>
-        <p:txBody>
-          <a:bodyPr rtlCol="0" anchor="ctr"/>
-          <a:lstStyle/>
-          <a:p>
-            <a:pPr algn="ctr"/>
-          </a:p>
-        </p:txBody>
-      </p:sp>
-      <p:sp>
-        <p:nvSpPr>
-          <p:cNvPr id="28" name="TextBox 27"/>
-          <p:cNvSpPr txBox="1"/>
-          <p:nvPr/>
-        </p:nvSpPr>
-        <p:spPr>
-          <a:xfrm>
-            <a:off x="6400800" y="4361688"/>
-            <a:ext cx="4892040" cy="320040"/>
-          </a:xfrm>
-          <a:prstGeom prst="rect">
-            <a:avLst/>
-          </a:prstGeom>
-          <a:noFill/>
-        </p:spPr>
-        <p:txBody>
-          <a:bodyPr wrap="square" lIns="73152" rIns="73152" tIns="73152" bIns="73152" anchor="ctr">
-            <a:spAutoFit/>
-          </a:bodyPr>
-          <a:lstStyle/>
-          <a:p>
-            <a:pPr algn="l"/>
-            <a:r>
-              <a:rPr sz="1600" b="1">
-                <a:solidFill>
-                  <a:srgbClr val="27699C"/>
-                </a:solidFill>
-                <a:latin typeface="Aptos"/>
-              </a:rPr>
-              <a:t>Main contribution?</a:t>
-            </a:r>
-          </a:p>
-        </p:txBody>
-      </p:sp>
-      <p:sp>
-        <p:nvSpPr>
-          <p:cNvPr id="29" name="TextBox 28"/>
-          <p:cNvSpPr txBox="1"/>
-          <p:nvPr/>
-        </p:nvSpPr>
-        <p:spPr>
-          <a:xfrm>
-            <a:off x="6400800" y="4727448"/>
-            <a:ext cx="4892040" cy="640080"/>
-          </a:xfrm>
-          <a:prstGeom prst="rect">
-            <a:avLst/>
-          </a:prstGeom>
-          <a:noFill/>
-        </p:spPr>
-        <p:txBody>
-          <a:bodyPr wrap="square" lIns="73152" rIns="73152" tIns="73152" bIns="73152" anchor="ctr">
-            <a:spAutoFit/>
-          </a:bodyPr>
-          <a:lstStyle/>
-          <a:p>
-            <a:pPr algn="l"/>
-            <a:r>
-              <a:rPr sz="1200" b="0">
-                <a:solidFill>
-                  <a:srgbClr val="1F2E37"/>
-                </a:solidFill>
-                <a:latin typeface="Aptos"/>
-              </a:rPr>
-              <a:t>Current signals, history, forecast, explanation, validation, and export in one dashboard.</a:t>
+              <a:t>• Add official Agmarknet and APMC datasets.
+• Create district, mandi, crop-grade, and unit-specific models.
+• Add prediction intervals and rolling backtests.
+• Add login, watchlists, alerts, and maps.
+• Deploy with a database and scheduled model refresh.</a:t>
             </a:r>
           </a:p>
         </p:txBody>
@@ -5661,6 +5345,1142 @@
 </file>
 
 <file path=ppt/slides/slide13.xml><?xml version="1.0" encoding="utf-8"?>
+<p:sld xmlns:a="http://schemas.openxmlformats.org/drawingml/2006/main" xmlns:p="http://schemas.openxmlformats.org/presentationml/2006/main" xmlns:r="http://schemas.openxmlformats.org/officeDocument/2006/relationships">
+  <p:cSld>
+    <p:bg>
+      <p:bgPr>
+        <a:solidFill>
+          <a:srgbClr val="F6F9F7"/>
+        </a:solidFill>
+        <a:effectLst/>
+      </p:bgPr>
+    </p:bg>
+    <p:spTree>
+      <p:nvGrpSpPr>
+        <p:cNvPr id="1" name=""/>
+        <p:cNvGrpSpPr/>
+        <p:nvPr/>
+      </p:nvGrpSpPr>
+      <p:grpSpPr/>
+      <p:sp>
+        <p:nvSpPr>
+          <p:cNvPr id="2" name="Rectangle 1"/>
+          <p:cNvSpPr/>
+          <p:nvPr/>
+        </p:nvSpPr>
+        <p:spPr>
+          <a:xfrm>
+            <a:off x="0" y="0"/>
+            <a:ext cx="12191695" cy="155448"/>
+          </a:xfrm>
+          <a:prstGeom prst="rect">
+            <a:avLst/>
+          </a:prstGeom>
+          <a:solidFill>
+            <a:srgbClr val="23855B"/>
+          </a:solidFill>
+          <a:ln>
+            <a:solidFill>
+              <a:srgbClr val="23855B"/>
+            </a:solidFill>
+          </a:ln>
+        </p:spPr>
+        <p:style>
+          <a:lnRef idx="1">
+            <a:schemeClr val="accent1"/>
+          </a:lnRef>
+          <a:fillRef idx="3">
+            <a:schemeClr val="accent1"/>
+          </a:fillRef>
+          <a:effectRef idx="2">
+            <a:schemeClr val="accent1"/>
+          </a:effectRef>
+          <a:fontRef idx="minor">
+            <a:schemeClr val="lt1"/>
+          </a:fontRef>
+        </p:style>
+        <p:txBody>
+          <a:bodyPr rtlCol="0" anchor="ctr"/>
+          <a:lstStyle/>
+          <a:p>
+            <a:pPr algn="ctr"/>
+          </a:p>
+        </p:txBody>
+      </p:sp>
+      <p:sp>
+        <p:nvSpPr>
+          <p:cNvPr id="3" name="TextBox 2"/>
+          <p:cNvSpPr txBox="1"/>
+          <p:nvPr/>
+        </p:nvSpPr>
+        <p:spPr>
+          <a:xfrm>
+            <a:off x="502920" y="310896"/>
+            <a:ext cx="10698480" cy="566928"/>
+          </a:xfrm>
+          <a:prstGeom prst="rect">
+            <a:avLst/>
+          </a:prstGeom>
+          <a:noFill/>
+        </p:spPr>
+        <p:txBody>
+          <a:bodyPr wrap="square" lIns="73152" rIns="73152" tIns="73152" bIns="73152" anchor="ctr">
+            <a:spAutoFit/>
+          </a:bodyPr>
+          <a:lstStyle/>
+          <a:p>
+            <a:pPr algn="l"/>
+            <a:r>
+              <a:rPr sz="2800" b="1">
+                <a:solidFill>
+                  <a:srgbClr val="0D202D"/>
+                </a:solidFill>
+                <a:latin typeface="Aptos"/>
+              </a:rPr>
+              <a:t>Key Viva Answers</a:t>
+            </a:r>
+          </a:p>
+        </p:txBody>
+      </p:sp>
+      <p:sp>
+        <p:nvSpPr>
+          <p:cNvPr id="4" name="TextBox 3"/>
+          <p:cNvSpPr txBox="1"/>
+          <p:nvPr/>
+        </p:nvSpPr>
+        <p:spPr>
+          <a:xfrm>
+            <a:off x="11064240" y="347472"/>
+            <a:ext cx="640080" cy="365760"/>
+          </a:xfrm>
+          <a:prstGeom prst="rect">
+            <a:avLst/>
+          </a:prstGeom>
+          <a:noFill/>
+        </p:spPr>
+        <p:txBody>
+          <a:bodyPr wrap="square" lIns="73152" rIns="73152" tIns="73152" bIns="73152" anchor="ctr">
+            <a:spAutoFit/>
+          </a:bodyPr>
+          <a:lstStyle/>
+          <a:p>
+            <a:pPr algn="r"/>
+            <a:r>
+              <a:rPr sz="1400" b="1">
+                <a:solidFill>
+                  <a:srgbClr val="23855B"/>
+                </a:solidFill>
+                <a:latin typeface="Aptos"/>
+              </a:rPr>
+              <a:t>13</a:t>
+            </a:r>
+          </a:p>
+        </p:txBody>
+      </p:sp>
+      <p:sp>
+        <p:nvSpPr>
+          <p:cNvPr id="5" name="TextBox 4"/>
+          <p:cNvSpPr txBox="1"/>
+          <p:nvPr/>
+        </p:nvSpPr>
+        <p:spPr>
+          <a:xfrm>
+            <a:off x="502920" y="6492240"/>
+            <a:ext cx="11155680" cy="201168"/>
+          </a:xfrm>
+          <a:prstGeom prst="rect">
+            <a:avLst/>
+          </a:prstGeom>
+          <a:noFill/>
+        </p:spPr>
+        <p:txBody>
+          <a:bodyPr wrap="square" lIns="73152" rIns="73152" tIns="73152" bIns="73152" anchor="ctr">
+            <a:spAutoFit/>
+          </a:bodyPr>
+          <a:lstStyle/>
+          <a:p>
+            <a:pPr algn="l"/>
+            <a:r>
+              <a:rPr sz="900" b="0">
+                <a:solidFill>
+                  <a:srgbClr val="5B6C74"/>
+                </a:solidFill>
+                <a:latin typeface="Aptos"/>
+              </a:rPr>
+              <a:t>CropSmart  |  BCA Final-Year Project  |  June 16, 2026</a:t>
+            </a:r>
+          </a:p>
+        </p:txBody>
+      </p:sp>
+      <p:sp>
+        <p:nvSpPr>
+          <p:cNvPr id="6" name="Rounded Rectangle 5"/>
+          <p:cNvSpPr/>
+          <p:nvPr/>
+        </p:nvSpPr>
+        <p:spPr>
+          <a:xfrm>
+            <a:off x="594360" y="1078992"/>
+            <a:ext cx="5212080" cy="1234440"/>
+          </a:xfrm>
+          <a:prstGeom prst="roundRect">
+            <a:avLst/>
+          </a:prstGeom>
+          <a:solidFill>
+            <a:srgbClr val="FFFFFF"/>
+          </a:solidFill>
+          <a:ln>
+            <a:solidFill>
+              <a:srgbClr val="DAE5DF"/>
+            </a:solidFill>
+          </a:ln>
+        </p:spPr>
+        <p:style>
+          <a:lnRef idx="1">
+            <a:schemeClr val="accent1"/>
+          </a:lnRef>
+          <a:fillRef idx="3">
+            <a:schemeClr val="accent1"/>
+          </a:fillRef>
+          <a:effectRef idx="2">
+            <a:schemeClr val="accent1"/>
+          </a:effectRef>
+          <a:fontRef idx="minor">
+            <a:schemeClr val="lt1"/>
+          </a:fontRef>
+        </p:style>
+        <p:txBody>
+          <a:bodyPr rtlCol="0" anchor="ctr"/>
+          <a:lstStyle/>
+          <a:p>
+            <a:pPr algn="ctr"/>
+          </a:p>
+        </p:txBody>
+      </p:sp>
+      <p:sp>
+        <p:nvSpPr>
+          <p:cNvPr id="7" name="Rectangle 6"/>
+          <p:cNvSpPr/>
+          <p:nvPr/>
+        </p:nvSpPr>
+        <p:spPr>
+          <a:xfrm>
+            <a:off x="594360" y="1078992"/>
+            <a:ext cx="73152" cy="1234440"/>
+          </a:xfrm>
+          <a:prstGeom prst="rect">
+            <a:avLst/>
+          </a:prstGeom>
+          <a:solidFill>
+            <a:srgbClr val="23855B"/>
+          </a:solidFill>
+          <a:ln>
+            <a:solidFill>
+              <a:srgbClr val="23855B"/>
+            </a:solidFill>
+          </a:ln>
+        </p:spPr>
+        <p:style>
+          <a:lnRef idx="1">
+            <a:schemeClr val="accent1"/>
+          </a:lnRef>
+          <a:fillRef idx="3">
+            <a:schemeClr val="accent1"/>
+          </a:fillRef>
+          <a:effectRef idx="2">
+            <a:schemeClr val="accent1"/>
+          </a:effectRef>
+          <a:fontRef idx="minor">
+            <a:schemeClr val="lt1"/>
+          </a:fontRef>
+        </p:style>
+        <p:txBody>
+          <a:bodyPr rtlCol="0" anchor="ctr"/>
+          <a:lstStyle/>
+          <a:p>
+            <a:pPr algn="ctr"/>
+          </a:p>
+        </p:txBody>
+      </p:sp>
+      <p:sp>
+        <p:nvSpPr>
+          <p:cNvPr id="8" name="TextBox 7"/>
+          <p:cNvSpPr txBox="1"/>
+          <p:nvPr/>
+        </p:nvSpPr>
+        <p:spPr>
+          <a:xfrm>
+            <a:off x="777240" y="1197864"/>
+            <a:ext cx="4892040" cy="320040"/>
+          </a:xfrm>
+          <a:prstGeom prst="rect">
+            <a:avLst/>
+          </a:prstGeom>
+          <a:noFill/>
+        </p:spPr>
+        <p:txBody>
+          <a:bodyPr wrap="square" lIns="73152" rIns="73152" tIns="73152" bIns="73152" anchor="ctr">
+            <a:spAutoFit/>
+          </a:bodyPr>
+          <a:lstStyle/>
+          <a:p>
+            <a:pPr algn="l"/>
+            <a:r>
+              <a:rPr sz="1600" b="1">
+                <a:solidFill>
+                  <a:srgbClr val="23855B"/>
+                </a:solidFill>
+                <a:latin typeface="Aptos"/>
+              </a:rPr>
+              <a:t>Project type?</a:t>
+            </a:r>
+          </a:p>
+        </p:txBody>
+      </p:sp>
+      <p:sp>
+        <p:nvSpPr>
+          <p:cNvPr id="9" name="TextBox 8"/>
+          <p:cNvSpPr txBox="1"/>
+          <p:nvPr/>
+        </p:nvSpPr>
+        <p:spPr>
+          <a:xfrm>
+            <a:off x="777240" y="1563624"/>
+            <a:ext cx="4892040" cy="640080"/>
+          </a:xfrm>
+          <a:prstGeom prst="rect">
+            <a:avLst/>
+          </a:prstGeom>
+          <a:noFill/>
+        </p:spPr>
+        <p:txBody>
+          <a:bodyPr wrap="square" lIns="73152" rIns="73152" tIns="73152" bIns="73152" anchor="ctr">
+            <a:spAutoFit/>
+          </a:bodyPr>
+          <a:lstStyle/>
+          <a:p>
+            <a:pPr algn="l"/>
+            <a:r>
+              <a:rPr sz="1200" b="0">
+                <a:solidFill>
+                  <a:srgbClr val="1F2E37"/>
+                </a:solidFill>
+                <a:latin typeface="Aptos"/>
+              </a:rPr>
+              <a:t>A regression and time-series forecasting web application.</a:t>
+            </a:r>
+          </a:p>
+        </p:txBody>
+      </p:sp>
+      <p:sp>
+        <p:nvSpPr>
+          <p:cNvPr id="10" name="Rounded Rectangle 9"/>
+          <p:cNvSpPr/>
+          <p:nvPr/>
+        </p:nvSpPr>
+        <p:spPr>
+          <a:xfrm>
+            <a:off x="6217920" y="1078992"/>
+            <a:ext cx="5212080" cy="1234440"/>
+          </a:xfrm>
+          <a:prstGeom prst="roundRect">
+            <a:avLst/>
+          </a:prstGeom>
+          <a:solidFill>
+            <a:srgbClr val="FFFFFF"/>
+          </a:solidFill>
+          <a:ln>
+            <a:solidFill>
+              <a:srgbClr val="DAE5DF"/>
+            </a:solidFill>
+          </a:ln>
+        </p:spPr>
+        <p:style>
+          <a:lnRef idx="1">
+            <a:schemeClr val="accent1"/>
+          </a:lnRef>
+          <a:fillRef idx="3">
+            <a:schemeClr val="accent1"/>
+          </a:fillRef>
+          <a:effectRef idx="2">
+            <a:schemeClr val="accent1"/>
+          </a:effectRef>
+          <a:fontRef idx="minor">
+            <a:schemeClr val="lt1"/>
+          </a:fontRef>
+        </p:style>
+        <p:txBody>
+          <a:bodyPr rtlCol="0" anchor="ctr"/>
+          <a:lstStyle/>
+          <a:p>
+            <a:pPr algn="ctr"/>
+          </a:p>
+        </p:txBody>
+      </p:sp>
+      <p:sp>
+        <p:nvSpPr>
+          <p:cNvPr id="11" name="Rectangle 10"/>
+          <p:cNvSpPr/>
+          <p:nvPr/>
+        </p:nvSpPr>
+        <p:spPr>
+          <a:xfrm>
+            <a:off x="6217920" y="1078992"/>
+            <a:ext cx="73152" cy="1234440"/>
+          </a:xfrm>
+          <a:prstGeom prst="rect">
+            <a:avLst/>
+          </a:prstGeom>
+          <a:solidFill>
+            <a:srgbClr val="27699C"/>
+          </a:solidFill>
+          <a:ln>
+            <a:solidFill>
+              <a:srgbClr val="27699C"/>
+            </a:solidFill>
+          </a:ln>
+        </p:spPr>
+        <p:style>
+          <a:lnRef idx="1">
+            <a:schemeClr val="accent1"/>
+          </a:lnRef>
+          <a:fillRef idx="3">
+            <a:schemeClr val="accent1"/>
+          </a:fillRef>
+          <a:effectRef idx="2">
+            <a:schemeClr val="accent1"/>
+          </a:effectRef>
+          <a:fontRef idx="minor">
+            <a:schemeClr val="lt1"/>
+          </a:fontRef>
+        </p:style>
+        <p:txBody>
+          <a:bodyPr rtlCol="0" anchor="ctr"/>
+          <a:lstStyle/>
+          <a:p>
+            <a:pPr algn="ctr"/>
+          </a:p>
+        </p:txBody>
+      </p:sp>
+      <p:sp>
+        <p:nvSpPr>
+          <p:cNvPr id="12" name="TextBox 11"/>
+          <p:cNvSpPr txBox="1"/>
+          <p:nvPr/>
+        </p:nvSpPr>
+        <p:spPr>
+          <a:xfrm>
+            <a:off x="6400800" y="1197864"/>
+            <a:ext cx="4892040" cy="320040"/>
+          </a:xfrm>
+          <a:prstGeom prst="rect">
+            <a:avLst/>
+          </a:prstGeom>
+          <a:noFill/>
+        </p:spPr>
+        <p:txBody>
+          <a:bodyPr wrap="square" lIns="73152" rIns="73152" tIns="73152" bIns="73152" anchor="ctr">
+            <a:spAutoFit/>
+          </a:bodyPr>
+          <a:lstStyle/>
+          <a:p>
+            <a:pPr algn="l"/>
+            <a:r>
+              <a:rPr sz="1600" b="1">
+                <a:solidFill>
+                  <a:srgbClr val="27699C"/>
+                </a:solidFill>
+                <a:latin typeface="Aptos"/>
+              </a:rPr>
+              <a:t>Why ridge regression?</a:t>
+            </a:r>
+          </a:p>
+        </p:txBody>
+      </p:sp>
+      <p:sp>
+        <p:nvSpPr>
+          <p:cNvPr id="13" name="TextBox 12"/>
+          <p:cNvSpPr txBox="1"/>
+          <p:nvPr/>
+        </p:nvSpPr>
+        <p:spPr>
+          <a:xfrm>
+            <a:off x="6400800" y="1563624"/>
+            <a:ext cx="4892040" cy="640080"/>
+          </a:xfrm>
+          <a:prstGeom prst="rect">
+            <a:avLst/>
+          </a:prstGeom>
+          <a:noFill/>
+        </p:spPr>
+        <p:txBody>
+          <a:bodyPr wrap="square" lIns="73152" rIns="73152" tIns="73152" bIns="73152" anchor="ctr">
+            <a:spAutoFit/>
+          </a:bodyPr>
+          <a:lstStyle/>
+          <a:p>
+            <a:pPr algn="l"/>
+            <a:r>
+              <a:rPr sz="1200" b="0">
+                <a:solidFill>
+                  <a:srgbClr val="1F2E37"/>
+                </a:solidFill>
+                <a:latin typeface="Aptos"/>
+              </a:rPr>
+              <a:t>It is fast, interpretable, handles correlated features, and reduces overfitting.</a:t>
+            </a:r>
+          </a:p>
+        </p:txBody>
+      </p:sp>
+      <p:sp>
+        <p:nvSpPr>
+          <p:cNvPr id="14" name="Rounded Rectangle 13"/>
+          <p:cNvSpPr/>
+          <p:nvPr/>
+        </p:nvSpPr>
+        <p:spPr>
+          <a:xfrm>
+            <a:off x="594360" y="2660904"/>
+            <a:ext cx="5212080" cy="1234440"/>
+          </a:xfrm>
+          <a:prstGeom prst="roundRect">
+            <a:avLst/>
+          </a:prstGeom>
+          <a:solidFill>
+            <a:srgbClr val="FFFFFF"/>
+          </a:solidFill>
+          <a:ln>
+            <a:solidFill>
+              <a:srgbClr val="DAE5DF"/>
+            </a:solidFill>
+          </a:ln>
+        </p:spPr>
+        <p:style>
+          <a:lnRef idx="1">
+            <a:schemeClr val="accent1"/>
+          </a:lnRef>
+          <a:fillRef idx="3">
+            <a:schemeClr val="accent1"/>
+          </a:fillRef>
+          <a:effectRef idx="2">
+            <a:schemeClr val="accent1"/>
+          </a:effectRef>
+          <a:fontRef idx="minor">
+            <a:schemeClr val="lt1"/>
+          </a:fontRef>
+        </p:style>
+        <p:txBody>
+          <a:bodyPr rtlCol="0" anchor="ctr"/>
+          <a:lstStyle/>
+          <a:p>
+            <a:pPr algn="ctr"/>
+          </a:p>
+        </p:txBody>
+      </p:sp>
+      <p:sp>
+        <p:nvSpPr>
+          <p:cNvPr id="15" name="Rectangle 14"/>
+          <p:cNvSpPr/>
+          <p:nvPr/>
+        </p:nvSpPr>
+        <p:spPr>
+          <a:xfrm>
+            <a:off x="594360" y="2660904"/>
+            <a:ext cx="73152" cy="1234440"/>
+          </a:xfrm>
+          <a:prstGeom prst="rect">
+            <a:avLst/>
+          </a:prstGeom>
+          <a:solidFill>
+            <a:srgbClr val="23855B"/>
+          </a:solidFill>
+          <a:ln>
+            <a:solidFill>
+              <a:srgbClr val="23855B"/>
+            </a:solidFill>
+          </a:ln>
+        </p:spPr>
+        <p:style>
+          <a:lnRef idx="1">
+            <a:schemeClr val="accent1"/>
+          </a:lnRef>
+          <a:fillRef idx="3">
+            <a:schemeClr val="accent1"/>
+          </a:fillRef>
+          <a:effectRef idx="2">
+            <a:schemeClr val="accent1"/>
+          </a:effectRef>
+          <a:fontRef idx="minor">
+            <a:schemeClr val="lt1"/>
+          </a:fontRef>
+        </p:style>
+        <p:txBody>
+          <a:bodyPr rtlCol="0" anchor="ctr"/>
+          <a:lstStyle/>
+          <a:p>
+            <a:pPr algn="ctr"/>
+          </a:p>
+        </p:txBody>
+      </p:sp>
+      <p:sp>
+        <p:nvSpPr>
+          <p:cNvPr id="16" name="TextBox 15"/>
+          <p:cNvSpPr txBox="1"/>
+          <p:nvPr/>
+        </p:nvSpPr>
+        <p:spPr>
+          <a:xfrm>
+            <a:off x="777240" y="2779776"/>
+            <a:ext cx="4892040" cy="320040"/>
+          </a:xfrm>
+          <a:prstGeom prst="rect">
+            <a:avLst/>
+          </a:prstGeom>
+          <a:noFill/>
+        </p:spPr>
+        <p:txBody>
+          <a:bodyPr wrap="square" lIns="73152" rIns="73152" tIns="73152" bIns="73152" anchor="ctr">
+            <a:spAutoFit/>
+          </a:bodyPr>
+          <a:lstStyle/>
+          <a:p>
+            <a:pPr algn="l"/>
+            <a:r>
+              <a:rPr sz="1600" b="1">
+                <a:solidFill>
+                  <a:srgbClr val="23855B"/>
+                </a:solidFill>
+                <a:latin typeface="Aptos"/>
+              </a:rPr>
+              <a:t>What is a lag?</a:t>
+            </a:r>
+          </a:p>
+        </p:txBody>
+      </p:sp>
+      <p:sp>
+        <p:nvSpPr>
+          <p:cNvPr id="17" name="TextBox 16"/>
+          <p:cNvSpPr txBox="1"/>
+          <p:nvPr/>
+        </p:nvSpPr>
+        <p:spPr>
+          <a:xfrm>
+            <a:off x="777240" y="3145536"/>
+            <a:ext cx="4892040" cy="640080"/>
+          </a:xfrm>
+          <a:prstGeom prst="rect">
+            <a:avLst/>
+          </a:prstGeom>
+          <a:noFill/>
+        </p:spPr>
+        <p:txBody>
+          <a:bodyPr wrap="square" lIns="73152" rIns="73152" tIns="73152" bIns="73152" anchor="ctr">
+            <a:spAutoFit/>
+          </a:bodyPr>
+          <a:lstStyle/>
+          <a:p>
+            <a:pPr algn="l"/>
+            <a:r>
+              <a:rPr sz="1200" b="0">
+                <a:solidFill>
+                  <a:srgbClr val="1F2E37"/>
+                </a:solidFill>
+                <a:latin typeface="Aptos"/>
+              </a:rPr>
+              <a:t>A previous price value used as an input for forecasting.</a:t>
+            </a:r>
+          </a:p>
+        </p:txBody>
+      </p:sp>
+      <p:sp>
+        <p:nvSpPr>
+          <p:cNvPr id="18" name="Rounded Rectangle 17"/>
+          <p:cNvSpPr/>
+          <p:nvPr/>
+        </p:nvSpPr>
+        <p:spPr>
+          <a:xfrm>
+            <a:off x="6217920" y="2660904"/>
+            <a:ext cx="5212080" cy="1234440"/>
+          </a:xfrm>
+          <a:prstGeom prst="roundRect">
+            <a:avLst/>
+          </a:prstGeom>
+          <a:solidFill>
+            <a:srgbClr val="FFFFFF"/>
+          </a:solidFill>
+          <a:ln>
+            <a:solidFill>
+              <a:srgbClr val="DAE5DF"/>
+            </a:solidFill>
+          </a:ln>
+        </p:spPr>
+        <p:style>
+          <a:lnRef idx="1">
+            <a:schemeClr val="accent1"/>
+          </a:lnRef>
+          <a:fillRef idx="3">
+            <a:schemeClr val="accent1"/>
+          </a:fillRef>
+          <a:effectRef idx="2">
+            <a:schemeClr val="accent1"/>
+          </a:effectRef>
+          <a:fontRef idx="minor">
+            <a:schemeClr val="lt1"/>
+          </a:fontRef>
+        </p:style>
+        <p:txBody>
+          <a:bodyPr rtlCol="0" anchor="ctr"/>
+          <a:lstStyle/>
+          <a:p>
+            <a:pPr algn="ctr"/>
+          </a:p>
+        </p:txBody>
+      </p:sp>
+      <p:sp>
+        <p:nvSpPr>
+          <p:cNvPr id="19" name="Rectangle 18"/>
+          <p:cNvSpPr/>
+          <p:nvPr/>
+        </p:nvSpPr>
+        <p:spPr>
+          <a:xfrm>
+            <a:off x="6217920" y="2660904"/>
+            <a:ext cx="73152" cy="1234440"/>
+          </a:xfrm>
+          <a:prstGeom prst="rect">
+            <a:avLst/>
+          </a:prstGeom>
+          <a:solidFill>
+            <a:srgbClr val="27699C"/>
+          </a:solidFill>
+          <a:ln>
+            <a:solidFill>
+              <a:srgbClr val="27699C"/>
+            </a:solidFill>
+          </a:ln>
+        </p:spPr>
+        <p:style>
+          <a:lnRef idx="1">
+            <a:schemeClr val="accent1"/>
+          </a:lnRef>
+          <a:fillRef idx="3">
+            <a:schemeClr val="accent1"/>
+          </a:fillRef>
+          <a:effectRef idx="2">
+            <a:schemeClr val="accent1"/>
+          </a:effectRef>
+          <a:fontRef idx="minor">
+            <a:schemeClr val="lt1"/>
+          </a:fontRef>
+        </p:style>
+        <p:txBody>
+          <a:bodyPr rtlCol="0" anchor="ctr"/>
+          <a:lstStyle/>
+          <a:p>
+            <a:pPr algn="ctr"/>
+          </a:p>
+        </p:txBody>
+      </p:sp>
+      <p:sp>
+        <p:nvSpPr>
+          <p:cNvPr id="20" name="TextBox 19"/>
+          <p:cNvSpPr txBox="1"/>
+          <p:nvPr/>
+        </p:nvSpPr>
+        <p:spPr>
+          <a:xfrm>
+            <a:off x="6400800" y="2779776"/>
+            <a:ext cx="4892040" cy="320040"/>
+          </a:xfrm>
+          <a:prstGeom prst="rect">
+            <a:avLst/>
+          </a:prstGeom>
+          <a:noFill/>
+        </p:spPr>
+        <p:txBody>
+          <a:bodyPr wrap="square" lIns="73152" rIns="73152" tIns="73152" bIns="73152" anchor="ctr">
+            <a:spAutoFit/>
+          </a:bodyPr>
+          <a:lstStyle/>
+          <a:p>
+            <a:pPr algn="l"/>
+            <a:r>
+              <a:rPr sz="1600" b="1">
+                <a:solidFill>
+                  <a:srgbClr val="27699C"/>
+                </a:solidFill>
+                <a:latin typeface="Aptos"/>
+              </a:rPr>
+              <a:t>What is MAPE?</a:t>
+            </a:r>
+          </a:p>
+        </p:txBody>
+      </p:sp>
+      <p:sp>
+        <p:nvSpPr>
+          <p:cNvPr id="21" name="TextBox 20"/>
+          <p:cNvSpPr txBox="1"/>
+          <p:nvPr/>
+        </p:nvSpPr>
+        <p:spPr>
+          <a:xfrm>
+            <a:off x="6400800" y="3145536"/>
+            <a:ext cx="4892040" cy="640080"/>
+          </a:xfrm>
+          <a:prstGeom prst="rect">
+            <a:avLst/>
+          </a:prstGeom>
+          <a:noFill/>
+        </p:spPr>
+        <p:txBody>
+          <a:bodyPr wrap="square" lIns="73152" rIns="73152" tIns="73152" bIns="73152" anchor="ctr">
+            <a:spAutoFit/>
+          </a:bodyPr>
+          <a:lstStyle/>
+          <a:p>
+            <a:pPr algn="l"/>
+            <a:r>
+              <a:rPr sz="1200" b="0">
+                <a:solidFill>
+                  <a:srgbClr val="1F2E37"/>
+                </a:solidFill>
+                <a:latin typeface="Aptos"/>
+              </a:rPr>
+              <a:t>Average prediction error expressed as a percentage; lower is better.</a:t>
+            </a:r>
+          </a:p>
+        </p:txBody>
+      </p:sp>
+      <p:sp>
+        <p:nvSpPr>
+          <p:cNvPr id="22" name="Rounded Rectangle 21"/>
+          <p:cNvSpPr/>
+          <p:nvPr/>
+        </p:nvSpPr>
+        <p:spPr>
+          <a:xfrm>
+            <a:off x="594360" y="4242816"/>
+            <a:ext cx="5212080" cy="1234440"/>
+          </a:xfrm>
+          <a:prstGeom prst="roundRect">
+            <a:avLst/>
+          </a:prstGeom>
+          <a:solidFill>
+            <a:srgbClr val="FFFFFF"/>
+          </a:solidFill>
+          <a:ln>
+            <a:solidFill>
+              <a:srgbClr val="DAE5DF"/>
+            </a:solidFill>
+          </a:ln>
+        </p:spPr>
+        <p:style>
+          <a:lnRef idx="1">
+            <a:schemeClr val="accent1"/>
+          </a:lnRef>
+          <a:fillRef idx="3">
+            <a:schemeClr val="accent1"/>
+          </a:fillRef>
+          <a:effectRef idx="2">
+            <a:schemeClr val="accent1"/>
+          </a:effectRef>
+          <a:fontRef idx="minor">
+            <a:schemeClr val="lt1"/>
+          </a:fontRef>
+        </p:style>
+        <p:txBody>
+          <a:bodyPr rtlCol="0" anchor="ctr"/>
+          <a:lstStyle/>
+          <a:p>
+            <a:pPr algn="ctr"/>
+          </a:p>
+        </p:txBody>
+      </p:sp>
+      <p:sp>
+        <p:nvSpPr>
+          <p:cNvPr id="23" name="Rectangle 22"/>
+          <p:cNvSpPr/>
+          <p:nvPr/>
+        </p:nvSpPr>
+        <p:spPr>
+          <a:xfrm>
+            <a:off x="594360" y="4242816"/>
+            <a:ext cx="73152" cy="1234440"/>
+          </a:xfrm>
+          <a:prstGeom prst="rect">
+            <a:avLst/>
+          </a:prstGeom>
+          <a:solidFill>
+            <a:srgbClr val="23855B"/>
+          </a:solidFill>
+          <a:ln>
+            <a:solidFill>
+              <a:srgbClr val="23855B"/>
+            </a:solidFill>
+          </a:ln>
+        </p:spPr>
+        <p:style>
+          <a:lnRef idx="1">
+            <a:schemeClr val="accent1"/>
+          </a:lnRef>
+          <a:fillRef idx="3">
+            <a:schemeClr val="accent1"/>
+          </a:fillRef>
+          <a:effectRef idx="2">
+            <a:schemeClr val="accent1"/>
+          </a:effectRef>
+          <a:fontRef idx="minor">
+            <a:schemeClr val="lt1"/>
+          </a:fontRef>
+        </p:style>
+        <p:txBody>
+          <a:bodyPr rtlCol="0" anchor="ctr"/>
+          <a:lstStyle/>
+          <a:p>
+            <a:pPr algn="ctr"/>
+          </a:p>
+        </p:txBody>
+      </p:sp>
+      <p:sp>
+        <p:nvSpPr>
+          <p:cNvPr id="24" name="TextBox 23"/>
+          <p:cNvSpPr txBox="1"/>
+          <p:nvPr/>
+        </p:nvSpPr>
+        <p:spPr>
+          <a:xfrm>
+            <a:off x="777240" y="4361688"/>
+            <a:ext cx="4892040" cy="320040"/>
+          </a:xfrm>
+          <a:prstGeom prst="rect">
+            <a:avLst/>
+          </a:prstGeom>
+          <a:noFill/>
+        </p:spPr>
+        <p:txBody>
+          <a:bodyPr wrap="square" lIns="73152" rIns="73152" tIns="73152" bIns="73152" anchor="ctr">
+            <a:spAutoFit/>
+          </a:bodyPr>
+          <a:lstStyle/>
+          <a:p>
+            <a:pPr algn="l"/>
+            <a:r>
+              <a:rPr sz="1600" b="1">
+                <a:solidFill>
+                  <a:srgbClr val="23855B"/>
+                </a:solidFill>
+                <a:latin typeface="Aptos"/>
+              </a:rPr>
+              <a:t>Is the price guaranteed?</a:t>
+            </a:r>
+          </a:p>
+        </p:txBody>
+      </p:sp>
+      <p:sp>
+        <p:nvSpPr>
+          <p:cNvPr id="25" name="TextBox 24"/>
+          <p:cNvSpPr txBox="1"/>
+          <p:nvPr/>
+        </p:nvSpPr>
+        <p:spPr>
+          <a:xfrm>
+            <a:off x="777240" y="4727448"/>
+            <a:ext cx="4892040" cy="640080"/>
+          </a:xfrm>
+          <a:prstGeom prst="rect">
+            <a:avLst/>
+          </a:prstGeom>
+          <a:noFill/>
+        </p:spPr>
+        <p:txBody>
+          <a:bodyPr wrap="square" lIns="73152" rIns="73152" tIns="73152" bIns="73152" anchor="ctr">
+            <a:spAutoFit/>
+          </a:bodyPr>
+          <a:lstStyle/>
+          <a:p>
+            <a:pPr algn="l"/>
+            <a:r>
+              <a:rPr sz="1200" b="0">
+                <a:solidFill>
+                  <a:srgbClr val="1F2E37"/>
+                </a:solidFill>
+                <a:latin typeface="Aptos"/>
+              </a:rPr>
+              <a:t>No. It is a planning estimate affected by market uncertainty.</a:t>
+            </a:r>
+          </a:p>
+        </p:txBody>
+      </p:sp>
+      <p:sp>
+        <p:nvSpPr>
+          <p:cNvPr id="26" name="Rounded Rectangle 25"/>
+          <p:cNvSpPr/>
+          <p:nvPr/>
+        </p:nvSpPr>
+        <p:spPr>
+          <a:xfrm>
+            <a:off x="6217920" y="4242816"/>
+            <a:ext cx="5212080" cy="1234440"/>
+          </a:xfrm>
+          <a:prstGeom prst="roundRect">
+            <a:avLst/>
+          </a:prstGeom>
+          <a:solidFill>
+            <a:srgbClr val="FFFFFF"/>
+          </a:solidFill>
+          <a:ln>
+            <a:solidFill>
+              <a:srgbClr val="DAE5DF"/>
+            </a:solidFill>
+          </a:ln>
+        </p:spPr>
+        <p:style>
+          <a:lnRef idx="1">
+            <a:schemeClr val="accent1"/>
+          </a:lnRef>
+          <a:fillRef idx="3">
+            <a:schemeClr val="accent1"/>
+          </a:fillRef>
+          <a:effectRef idx="2">
+            <a:schemeClr val="accent1"/>
+          </a:effectRef>
+          <a:fontRef idx="minor">
+            <a:schemeClr val="lt1"/>
+          </a:fontRef>
+        </p:style>
+        <p:txBody>
+          <a:bodyPr rtlCol="0" anchor="ctr"/>
+          <a:lstStyle/>
+          <a:p>
+            <a:pPr algn="ctr"/>
+          </a:p>
+        </p:txBody>
+      </p:sp>
+      <p:sp>
+        <p:nvSpPr>
+          <p:cNvPr id="27" name="Rectangle 26"/>
+          <p:cNvSpPr/>
+          <p:nvPr/>
+        </p:nvSpPr>
+        <p:spPr>
+          <a:xfrm>
+            <a:off x="6217920" y="4242816"/>
+            <a:ext cx="73152" cy="1234440"/>
+          </a:xfrm>
+          <a:prstGeom prst="rect">
+            <a:avLst/>
+          </a:prstGeom>
+          <a:solidFill>
+            <a:srgbClr val="27699C"/>
+          </a:solidFill>
+          <a:ln>
+            <a:solidFill>
+              <a:srgbClr val="27699C"/>
+            </a:solidFill>
+          </a:ln>
+        </p:spPr>
+        <p:style>
+          <a:lnRef idx="1">
+            <a:schemeClr val="accent1"/>
+          </a:lnRef>
+          <a:fillRef idx="3">
+            <a:schemeClr val="accent1"/>
+          </a:fillRef>
+          <a:effectRef idx="2">
+            <a:schemeClr val="accent1"/>
+          </a:effectRef>
+          <a:fontRef idx="minor">
+            <a:schemeClr val="lt1"/>
+          </a:fontRef>
+        </p:style>
+        <p:txBody>
+          <a:bodyPr rtlCol="0" anchor="ctr"/>
+          <a:lstStyle/>
+          <a:p>
+            <a:pPr algn="ctr"/>
+          </a:p>
+        </p:txBody>
+      </p:sp>
+      <p:sp>
+        <p:nvSpPr>
+          <p:cNvPr id="28" name="TextBox 27"/>
+          <p:cNvSpPr txBox="1"/>
+          <p:nvPr/>
+        </p:nvSpPr>
+        <p:spPr>
+          <a:xfrm>
+            <a:off x="6400800" y="4361688"/>
+            <a:ext cx="4892040" cy="320040"/>
+          </a:xfrm>
+          <a:prstGeom prst="rect">
+            <a:avLst/>
+          </a:prstGeom>
+          <a:noFill/>
+        </p:spPr>
+        <p:txBody>
+          <a:bodyPr wrap="square" lIns="73152" rIns="73152" tIns="73152" bIns="73152" anchor="ctr">
+            <a:spAutoFit/>
+          </a:bodyPr>
+          <a:lstStyle/>
+          <a:p>
+            <a:pPr algn="l"/>
+            <a:r>
+              <a:rPr sz="1600" b="1">
+                <a:solidFill>
+                  <a:srgbClr val="27699C"/>
+                </a:solidFill>
+                <a:latin typeface="Aptos"/>
+              </a:rPr>
+              <a:t>Main contribution?</a:t>
+            </a:r>
+          </a:p>
+        </p:txBody>
+      </p:sp>
+      <p:sp>
+        <p:nvSpPr>
+          <p:cNvPr id="29" name="TextBox 28"/>
+          <p:cNvSpPr txBox="1"/>
+          <p:nvPr/>
+        </p:nvSpPr>
+        <p:spPr>
+          <a:xfrm>
+            <a:off x="6400800" y="4727448"/>
+            <a:ext cx="4892040" cy="640080"/>
+          </a:xfrm>
+          <a:prstGeom prst="rect">
+            <a:avLst/>
+          </a:prstGeom>
+          <a:noFill/>
+        </p:spPr>
+        <p:txBody>
+          <a:bodyPr wrap="square" lIns="73152" rIns="73152" tIns="73152" bIns="73152" anchor="ctr">
+            <a:spAutoFit/>
+          </a:bodyPr>
+          <a:lstStyle/>
+          <a:p>
+            <a:pPr algn="l"/>
+            <a:r>
+              <a:rPr sz="1200" b="0">
+                <a:solidFill>
+                  <a:srgbClr val="1F2E37"/>
+                </a:solidFill>
+                <a:latin typeface="Aptos"/>
+              </a:rPr>
+              <a:t>Current signals, history, forecast, explanation, validation, and export in one dashboard.</a:t>
+            </a:r>
+          </a:p>
+        </p:txBody>
+      </p:sp>
+    </p:spTree>
+  </p:cSld>
+  <p:clrMapOvr>
+    <a:masterClrMapping/>
+  </p:clrMapOvr>
+</p:sld>
+</file>
+
+<file path=ppt/slides/slide14.xml><?xml version="1.0" encoding="utf-8"?>
 <p:sld xmlns:a="http://schemas.openxmlformats.org/drawingml/2006/main" xmlns:p="http://schemas.openxmlformats.org/presentationml/2006/main" xmlns:r="http://schemas.openxmlformats.org/officeDocument/2006/relationships">
   <p:cSld>
     <p:bg>
